--- a/docs/02_User_Manual_Summary.pptx
+++ b/docs/02_User_Manual_Summary.pptx
@@ -3221,7 +3221,7 @@
                 </a:solidFill>
                 <a:latin typeface="Segoe UI Semibold"/>
               </a:rPr>
-              <a:t>P3MAI  ·  METHOD MAP</a:t>
+              <a:t>P3MAI  ·  PMO SERVICE</a:t>
             </a:r>
           </a:p>
         </p:txBody>
